--- a/Evidencias del Proyecto/Estado actual de la plicación.pptx
+++ b/Evidencias del Proyecto/Estado actual de la plicación.pptx
@@ -6140,8 +6140,12 @@
           <a:p>
             <a:pPr lvl="1"/>
             <a:r>
+              <a:rPr lang="es-CL"/>
+              <a:t>1- NAVEGACIÓN </a:t>
+            </a:r>
+            <a:r>
               <a:rPr lang="es-CL" dirty="0"/>
-              <a:t>1- NABEJACIÓN VIA COMANDOS DE VOZ</a:t>
+              <a:t>VIA COMANDOS DE VOZ</a:t>
             </a:r>
           </a:p>
           <a:p>
